--- a/slides/champs_unimol.pptx
+++ b/slides/champs_unimol.pptx
@@ -127,7 +127,7 @@
   <p:extLst>
     <p:ext uri="{521415D9-36F7-43E2-AB2F-B90AF26B5E84}">
       <p14:sectionLst xmlns:p14="http://schemas.microsoft.com/office/powerpoint/2010/main">
-        <p14:section name="導入" id="{e408382d-ce64-c040-1469-e2fe88c21526}">
+        <p14:section name="導入" id="{55fc6885-218b-2bee-3304-a44ffbaa1ba3}">
           <p14:sldIdLst>
             <p14:sldId id="256"/>
             <p14:sldId id="257"/>
@@ -135,20 +135,20 @@
             <p14:sldId id="259"/>
           </p14:sldIdLst>
         </p14:section>
-        <p14:section name="調査と方針" id="{f153d261-5e72-5e24-911f-95add4067c1b}">
+        <p14:section name="調査と方針" id="{779aff66-dfd2-f84d-d2b7-8fcc12a0d39d}">
           <p14:sldIdLst>
             <p14:sldId id="260"/>
             <p14:sldId id="261"/>
             <p14:sldId id="262"/>
           </p14:sldIdLst>
         </p14:section>
-        <p14:section name="EDA" id="{c66856d0-76df-560e-4058-c2ffb15c9d80}">
+        <p14:section name="EDA" id="{f5802818-57ec-3f5d-a34e-3f9aff903c54}">
           <p14:sldIdLst>
             <p14:sldId id="263"/>
             <p14:sldId id="264"/>
           </p14:sldIdLst>
         </p14:section>
-        <p14:section name="Uni-Mol" id="{40de75a1-0a99-376a-7bb2-798b6050c21b}">
+        <p14:section name="Uni-Mol" id="{13efb6d0-a8fa-eaf9-8e31-36525f0448e8}">
           <p14:sldIdLst>
             <p14:sldId id="265"/>
             <p14:sldId id="266"/>
@@ -161,7 +161,7 @@
             <p14:sldId id="273"/>
           </p14:sldIdLst>
         </p14:section>
-        <p14:section name="結果" id="{ee4e8589-6f9c-e14b-a0e7-3cda3ad8bd56}">
+        <p14:section name="結果" id="{ca5fcd6d-bc59-7e18-5794-35e7edaee483}">
           <p14:sldIdLst>
             <p14:sldId id="274"/>
             <p14:sldId id="275"/>
@@ -3034,6 +3034,456 @@
                 </c:pt>
                 <c:pt idx="59">
                   <c:v>-2.1584283262491226</c:v>
+                </c:pt>
+              </c:numCache>
+            </c:numRef>
+          </c:val>
+          <c:smooth val="0"/>
+        </c:ser>
+        <c:ser>
+          <c:idx val="2"/>
+          <c:order val="2"/>
+          <c:tx>
+            <c:strRef>
+              <c:f>Sheet1!$D$1</c:f>
+              <c:strCache>
+                <c:ptCount val="1"/>
+                <c:pt idx="0">
+                  <c:v>原子の補助ターゲットあり</c:v>
+                </c:pt>
+              </c:strCache>
+            </c:strRef>
+          </c:tx>
+          <c:spPr>
+            <a:solidFill>
+              <a:srgbClr val="1F7A78"/>
+            </a:solidFill>
+            <a:ln w="31750" cap="flat">
+              <a:solidFill>
+                <a:srgbClr val="1F7A78"/>
+              </a:solidFill>
+              <a:prstDash val="solid"/>
+              <a:round/>
+            </a:ln>
+            <a:effectLst/>
+          </c:spPr>
+          <c:invertIfNegative val="0"/>
+          <c:dLbls>
+            <c:numFmt formatCode="#,##0" sourceLinked="0"/>
+            <c:txPr>
+              <a:bodyPr/>
+              <a:lstStyle/>
+              <a:p>
+                <a:pPr>
+                  <a:defRPr b="0" i="0" strike="noStrike" sz="1200" u="none">
+                    <a:solidFill>
+                      <a:srgbClr val="000000"/>
+                    </a:solidFill>
+                    <a:latin typeface="+mn-lt"/>
+                  </a:defRPr>
+                </a:pPr>
+              </a:p>
+            </c:txPr>
+            <c:showLegendKey val="0"/>
+            <c:showVal val="0"/>
+            <c:showCatName val="0"/>
+            <c:showSerName val="0"/>
+            <c:showPercent val="0"/>
+            <c:showBubbleSize val="0"/>
+            <c:showLeaderLines val="0"/>
+          </c:dLbls>
+          <c:marker>
+            <c:symbol val="none"/>
+            <c:size val="6"/>
+            <c:spPr>
+              <a:solidFill>
+                <a:srgbClr val="1F7A78"/>
+              </a:solidFill>
+              <a:ln w="9525" cap="flat">
+                <a:solidFill>
+                  <a:srgbClr val="1F7A78"/>
+                </a:solidFill>
+                <a:prstDash val="solid"/>
+                <a:round/>
+              </a:ln>
+              <a:effectLst/>
+            </c:spPr>
+          </c:marker>
+          <c:cat>
+            <c:multiLvlStrRef>
+              <c:f>Sheet1!$A$2:$A$61</c:f>
+              <c:multiLvlStrCache>
+                <c:ptCount val="60"/>
+                <c:lvl>
+                  <c:pt idx="0">
+                    <c:v>0</c:v>
+                  </c:pt>
+                  <c:pt idx="1">
+                    <c:v>1</c:v>
+                  </c:pt>
+                  <c:pt idx="2">
+                    <c:v>2</c:v>
+                  </c:pt>
+                  <c:pt idx="3">
+                    <c:v>3</c:v>
+                  </c:pt>
+                  <c:pt idx="4">
+                    <c:v>4</c:v>
+                  </c:pt>
+                  <c:pt idx="5">
+                    <c:v>5</c:v>
+                  </c:pt>
+                  <c:pt idx="6">
+                    <c:v>6</c:v>
+                  </c:pt>
+                  <c:pt idx="7">
+                    <c:v>7</c:v>
+                  </c:pt>
+                  <c:pt idx="8">
+                    <c:v>8</c:v>
+                  </c:pt>
+                  <c:pt idx="9">
+                    <c:v>9</c:v>
+                  </c:pt>
+                  <c:pt idx="10">
+                    <c:v>10</c:v>
+                  </c:pt>
+                  <c:pt idx="11">
+                    <c:v>11</c:v>
+                  </c:pt>
+                  <c:pt idx="12">
+                    <c:v>12</c:v>
+                  </c:pt>
+                  <c:pt idx="13">
+                    <c:v>13</c:v>
+                  </c:pt>
+                  <c:pt idx="14">
+                    <c:v>14</c:v>
+                  </c:pt>
+                  <c:pt idx="15">
+                    <c:v>15</c:v>
+                  </c:pt>
+                  <c:pt idx="16">
+                    <c:v>16</c:v>
+                  </c:pt>
+                  <c:pt idx="17">
+                    <c:v>17</c:v>
+                  </c:pt>
+                  <c:pt idx="18">
+                    <c:v>18</c:v>
+                  </c:pt>
+                  <c:pt idx="19">
+                    <c:v>19</c:v>
+                  </c:pt>
+                  <c:pt idx="20">
+                    <c:v>20</c:v>
+                  </c:pt>
+                  <c:pt idx="21">
+                    <c:v>21</c:v>
+                  </c:pt>
+                  <c:pt idx="22">
+                    <c:v>22</c:v>
+                  </c:pt>
+                  <c:pt idx="23">
+                    <c:v>23</c:v>
+                  </c:pt>
+                  <c:pt idx="24">
+                    <c:v>24</c:v>
+                  </c:pt>
+                  <c:pt idx="25">
+                    <c:v>25</c:v>
+                  </c:pt>
+                  <c:pt idx="26">
+                    <c:v>26</c:v>
+                  </c:pt>
+                  <c:pt idx="27">
+                    <c:v>27</c:v>
+                  </c:pt>
+                  <c:pt idx="28">
+                    <c:v>28</c:v>
+                  </c:pt>
+                  <c:pt idx="29">
+                    <c:v>29</c:v>
+                  </c:pt>
+                  <c:pt idx="30">
+                    <c:v>30</c:v>
+                  </c:pt>
+                  <c:pt idx="31">
+                    <c:v>31</c:v>
+                  </c:pt>
+                  <c:pt idx="32">
+                    <c:v>32</c:v>
+                  </c:pt>
+                  <c:pt idx="33">
+                    <c:v>33</c:v>
+                  </c:pt>
+                  <c:pt idx="34">
+                    <c:v>34</c:v>
+                  </c:pt>
+                  <c:pt idx="35">
+                    <c:v>35</c:v>
+                  </c:pt>
+                  <c:pt idx="36">
+                    <c:v>36</c:v>
+                  </c:pt>
+                  <c:pt idx="37">
+                    <c:v>37</c:v>
+                  </c:pt>
+                  <c:pt idx="38">
+                    <c:v>38</c:v>
+                  </c:pt>
+                  <c:pt idx="39">
+                    <c:v>39</c:v>
+                  </c:pt>
+                  <c:pt idx="40">
+                    <c:v>40</c:v>
+                  </c:pt>
+                  <c:pt idx="41">
+                    <c:v>41</c:v>
+                  </c:pt>
+                  <c:pt idx="42">
+                    <c:v>42</c:v>
+                  </c:pt>
+                  <c:pt idx="43">
+                    <c:v>43</c:v>
+                  </c:pt>
+                  <c:pt idx="44">
+                    <c:v>44</c:v>
+                  </c:pt>
+                  <c:pt idx="45">
+                    <c:v>45</c:v>
+                  </c:pt>
+                  <c:pt idx="46">
+                    <c:v>46</c:v>
+                  </c:pt>
+                  <c:pt idx="47">
+                    <c:v>47</c:v>
+                  </c:pt>
+                  <c:pt idx="48">
+                    <c:v>48</c:v>
+                  </c:pt>
+                  <c:pt idx="49">
+                    <c:v>49</c:v>
+                  </c:pt>
+                  <c:pt idx="50">
+                    <c:v>50</c:v>
+                  </c:pt>
+                  <c:pt idx="51">
+                    <c:v>51</c:v>
+                  </c:pt>
+                  <c:pt idx="52">
+                    <c:v>52</c:v>
+                  </c:pt>
+                  <c:pt idx="53">
+                    <c:v>53</c:v>
+                  </c:pt>
+                  <c:pt idx="54">
+                    <c:v>54</c:v>
+                  </c:pt>
+                  <c:pt idx="55">
+                    <c:v>55</c:v>
+                  </c:pt>
+                  <c:pt idx="56">
+                    <c:v>56</c:v>
+                  </c:pt>
+                  <c:pt idx="57">
+                    <c:v>57</c:v>
+                  </c:pt>
+                  <c:pt idx="58">
+                    <c:v>58</c:v>
+                  </c:pt>
+                  <c:pt idx="59">
+                    <c:v>59</c:v>
+                  </c:pt>
+                </c:lvl>
+              </c:multiLvlStrCache>
+            </c:multiLvlStrRef>
+          </c:cat>
+          <c:val>
+            <c:numRef>
+              <c:f>Sheet1!$D$2:$D$61</c:f>
+              <c:numCache>
+                <c:formatCode>General</c:formatCode>
+                <c:ptCount val="60"/>
+                <c:pt idx="0">
+                  <c:v>-0.2636926820850931</c:v>
+                </c:pt>
+                <c:pt idx="1">
+                  <c:v>-0.6141854710876942</c:v>
+                </c:pt>
+                <c:pt idx="2">
+                  <c:v>-0.9809577818959951</c:v>
+                </c:pt>
+                <c:pt idx="3">
+                  <c:v>-1.043761254986748</c:v>
+                </c:pt>
+                <c:pt idx="4">
+                  <c:v>-1.089200466987677</c:v>
+                </c:pt>
+                <c:pt idx="5">
+                  <c:v>-1.1925992295145988</c:v>
+                </c:pt>
+                <c:pt idx="6">
+                  <c:v>-1.2620774786919355</c:v>
+                </c:pt>
+                <c:pt idx="7">
+                  <c:v>-1.475975975394249</c:v>
+                </c:pt>
+                <c:pt idx="8">
+                  <c:v>-1.5309596434235573</c:v>
+                </c:pt>
+                <c:pt idx="9">
+                  <c:v>-1.370920592918992</c:v>
+                </c:pt>
+                <c:pt idx="10">
+                  <c:v>-1.5269632637500763</c:v>
+                </c:pt>
+                <c:pt idx="11">
+                  <c:v>-1.5437933281064034</c:v>
+                </c:pt>
+                <c:pt idx="12">
+                  <c:v>-1.561393454670906</c:v>
+                </c:pt>
+                <c:pt idx="13">
+                  <c:v>-1.6434448659420013</c:v>
+                </c:pt>
+                <c:pt idx="14">
+                  <c:v>-1.7463803589344025</c:v>
+                </c:pt>
+                <c:pt idx="15">
+                  <c:v>-1.6796564310789108</c:v>
+                </c:pt>
+                <c:pt idx="16">
+                  <c:v>-1.697681039571762</c:v>
+                </c:pt>
+                <c:pt idx="17">
+                  <c:v>-1.896730326116085</c:v>
+                </c:pt>
+                <c:pt idx="18">
+                  <c:v>-1.8646263927221298</c:v>
+                </c:pt>
+                <c:pt idx="19">
+                  <c:v>-1.8299879729747772</c:v>
+                </c:pt>
+                <c:pt idx="20">
+                  <c:v>-1.8663767576217651</c:v>
+                </c:pt>
+                <c:pt idx="21">
+                  <c:v>-1.8543353751301765</c:v>
+                </c:pt>
+                <c:pt idx="22">
+                  <c:v>-1.9938598722219467</c:v>
+                </c:pt>
+                <c:pt idx="23">
+                  <c:v>-1.919268250465393</c:v>
+                </c:pt>
+                <c:pt idx="24">
+                  <c:v>-1.9569035097956657</c:v>
+                </c:pt>
+                <c:pt idx="25">
+                  <c:v>-1.9438535869121552</c:v>
+                </c:pt>
+                <c:pt idx="26">
+                  <c:v>-1.9817426800727844</c:v>
+                </c:pt>
+                <c:pt idx="27">
+                  <c:v>-1.9986238479614258</c:v>
+                </c:pt>
+                <c:pt idx="28">
+                  <c:v>-2.09441976249218</c:v>
+                </c:pt>
+                <c:pt idx="29">
+                  <c:v>-2.0092526227235794</c:v>
+                </c:pt>
+                <c:pt idx="30">
+                  <c:v>-2.053357779979706</c:v>
+                </c:pt>
+                <c:pt idx="31">
+                  <c:v>-2.1245313733816147</c:v>
+                </c:pt>
+                <c:pt idx="32">
+                  <c:v>-2.1426372975111008</c:v>
+                </c:pt>
+                <c:pt idx="33">
+                  <c:v>-2.19474433362484</c:v>
+                </c:pt>
+                <c:pt idx="34">
+                  <c:v>-2.1684866696596146</c:v>
+                </c:pt>
+                <c:pt idx="35">
+                  <c:v>-2.16903518140316</c:v>
+                </c:pt>
+                <c:pt idx="36">
+                  <c:v>-2.2194644659757614</c:v>
+                </c:pt>
+                <c:pt idx="37">
+                  <c:v>-2.2105629444122314</c:v>
+                </c:pt>
+                <c:pt idx="38">
+                  <c:v>-2.2455871403217316</c:v>
+                </c:pt>
+                <c:pt idx="39">
+                  <c:v>-2.257030576467514</c:v>
+                </c:pt>
+                <c:pt idx="40">
+                  <c:v>-2.2765419483184814</c:v>
+                </c:pt>
+                <c:pt idx="41">
+                  <c:v>-2.291884571313858</c:v>
+                </c:pt>
+                <c:pt idx="42">
+                  <c:v>-2.2854416966438293</c:v>
+                </c:pt>
+                <c:pt idx="43">
+                  <c:v>-2.285629689693451</c:v>
+                </c:pt>
+                <c:pt idx="44">
+                  <c:v>-2.2982902377843857</c:v>
+                </c:pt>
+                <c:pt idx="45">
+                  <c:v>-2.326824337244034</c:v>
+                </c:pt>
+                <c:pt idx="46">
+                  <c:v>-2.339522823691368</c:v>
+                </c:pt>
+                <c:pt idx="47">
+                  <c:v>-2.3405620008707047</c:v>
+                </c:pt>
+                <c:pt idx="48">
+                  <c:v>-2.3397693932056427</c:v>
+                </c:pt>
+                <c:pt idx="49">
+                  <c:v>-2.3522509932518005</c:v>
+                </c:pt>
+                <c:pt idx="50">
+                  <c:v>-2.357241705060005</c:v>
+                </c:pt>
+                <c:pt idx="51">
+                  <c:v>-2.3636990934610367</c:v>
+                </c:pt>
+                <c:pt idx="52">
+                  <c:v>-2.3690550327301025</c:v>
+                </c:pt>
+                <c:pt idx="53">
+                  <c:v>-2.372577652335167</c:v>
+                </c:pt>
+                <c:pt idx="54">
+                  <c:v>-2.37528058886528</c:v>
+                </c:pt>
+                <c:pt idx="55">
+                  <c:v>-2.377116173505783</c:v>
+                </c:pt>
+                <c:pt idx="56">
+                  <c:v>-2.378042921423912</c:v>
+                </c:pt>
+                <c:pt idx="57">
+                  <c:v>-2.37887242436409</c:v>
+                </c:pt>
+                <c:pt idx="58">
+                  <c:v>-2.379302605986595</c:v>
+                </c:pt>
+                <c:pt idx="59">
+                  <c:v>-2.3792844265699387</c:v>
                 </c:pt>
               </c:numCache>
             </c:numRef>
@@ -4483,7 +4933,7 @@
           <a:p>
             <a:r>
               <a:rPr lang="en-US" dirty="0"/>
-              <a:t>Uni-Mol の fine-tune を、設定を変えて2回学習しました。1つ目は基本の設定。学習と検証の差が開いて覚え込みが目立ったので、2つ目は dropout と、J の4成分も一緒に当てさせる補助損失を入れた「覚え込み対策あり」です。</a:t>
+              <a:t>Uni-Mol の fine-tune を、設定を変えて3回学習しました。1つ目は基本の設定。学習と検証の差が開いて覚え込みが目立ったので、2つ目は dropout と、J の4成分も一緒に当てさせる補助損失を入れた「覚え込み対策あり」。3つ目は基本の設定に、原子ごとの Mulliken 電荷と磁気遮蔽も当てさせる補助ターゲットを足したものです。EDA で、本物の電荷や遮蔽があると J の誤差が減ると分かっていたので、学習のときだけ使いました。</a:t>
             </a:r>
             <a:endParaRPr lang="en-US" dirty="0"/>
           </a:p>
@@ -4571,7 +5021,7 @@
           <a:p>
             <a:r>
               <a:rPr lang="en-US" dirty="0"/>
-              <a:t>流れは5つです。結論を先に言うと、Uni-Mol を fine-tune したモデル2本の平均で Private -2.424、当時の最終順位なら38位前後でした。1本だけだと -2.372（42位前後）です。</a:t>
+              <a:t>流れは5つです。結論を先に言うと、Uni-Mol を fine-tune したモデル3本の平均で Private -2.497、当時の最終順位なら33位前後でした。1本だけだと -2.372（42位前後）です。</a:t>
             </a:r>
             <a:endParaRPr lang="en-US" dirty="0"/>
           </a:p>
@@ -4659,7 +5109,7 @@
           <a:p>
             <a:r>
               <a:rPr lang="en-US" dirty="0"/>
-              <a:t>基本の設定は検証 -2.385、Private -2.372。覚え込み対策ありは、単体では全 type で悪化しました。それでも 7:3 で混ぜると Private -2.424 まで伸びて、当時の順位なら38位前後です。検証と LB はほぼ一致していました。</a:t>
+              <a:t>基本の設定は検証 -2.385、Private -2.372。覚え込み対策ありは単体では全 type で悪化、原子の補助ターゲットありは単体ではほぼ同じでした（1JHN は改善、3JHC は悪化）。それでも3本を 0.5 / 0.1 / 0.4 で混ぜると Private -2.497 まで伸びて、当時の順位なら33位前後です。検証と LB はほぼ一致していました。</a:t>
             </a:r>
             <a:endParaRPr lang="en-US" dirty="0"/>
           </a:p>
@@ -4747,7 +5197,7 @@
           <a:p>
             <a:r>
               <a:rPr lang="en-US" dirty="0"/>
-              <a:t>事前学習モデルの fine-tune で銀メダル圏まで来ました。課題は覚え込みと、1JHC などの弱い type。覚え込み対策ありは60エポックでは学習不足だったようなので、エポックを増やして試したい。あとはモデルを増やして平均、弱い type の fine-tune です。</a:t>
+              <a:t>事前学習モデルの fine-tune 3本の平均で銀メダル圏まで来ました。どの工夫も単体では基本の設定を超えませんでしたが、混ぜると伸びました。課題は覚え込みと、1JHC などの弱い type。次はエポックを増やす、モデルを増やして平均、弱い type の fine-tune です。</a:t>
             </a:r>
             <a:endParaRPr lang="en-US" dirty="0"/>
           </a:p>
@@ -17929,7 +18379,7 @@
                   <a:schemeClr val="tx2"/>
                 </a:solidFill>
               </a:rPr>
-              <a:t>学習した 2 つのモデル</a:t>
+              <a:t>学習した 3 つのモデル</a:t>
             </a:r>
             <a:endParaRPr lang="en-US" sz="3200" dirty="0"/>
           </a:p>
@@ -17958,9 +18408,10 @@
             <a:tbl>
               <a:tblPr/>
               <a:tblGrid>
-                <a:gridCol w="2377440"/>
-                <a:gridCol w="3474720"/>
-                <a:gridCol w="5242255"/>
+                <a:gridCol w="2194560"/>
+                <a:gridCol w="2834640"/>
+                <a:gridCol w="2926080"/>
+                <a:gridCol w="3139135"/>
               </a:tblGrid>
               <a:tr h="475488">
                 <a:tc>
@@ -18138,6 +18589,67 @@
                     </a:solidFill>
                   </a:tcPr>
                 </a:tc>
+                <a:tc>
+                  <a:txBody>
+                    <a:bodyPr/>
+                    <a:lstStyle/>
+                    <a:p>
+                      <a:pPr indent="0" marL="0">
+                        <a:buNone/>
+                      </a:pPr>
+                      <a:r>
+                        <a:rPr lang="en-US" sz="1500" b="1" dirty="0">
+                          <a:solidFill>
+                            <a:srgbClr val="FFFFFF"/>
+                          </a:solidFill>
+                        </a:rPr>
+                        <a:t>原子の補助ターゲットあり</a:t>
+                      </a:r>
+                      <a:endParaRPr lang="en-US" sz="1500" dirty="0"/>
+                    </a:p>
+                  </a:txBody>
+                  <a:tcPr marL="137160" marR="137160" marT="45720" marB="45720" anchor="ctr">
+                    <a:lnL w="12700" cap="flat" cmpd="sng" algn="ctr">
+                      <a:solidFill>
+                        <a:srgbClr val="FFFFFF"/>
+                      </a:solidFill>
+                      <a:prstDash val="solid"/>
+                      <a:round/>
+                      <a:headEnd type="none" w="med" len="med"/>
+                      <a:tailEnd type="none" w="med" len="med"/>
+                    </a:lnL>
+                    <a:lnR w="12700" cap="flat" cmpd="sng" algn="ctr">
+                      <a:solidFill>
+                        <a:srgbClr val="FFFFFF"/>
+                      </a:solidFill>
+                      <a:prstDash val="solid"/>
+                      <a:round/>
+                      <a:headEnd type="none" w="med" len="med"/>
+                      <a:tailEnd type="none" w="med" len="med"/>
+                    </a:lnR>
+                    <a:lnT w="12700" cap="flat" cmpd="sng" algn="ctr">
+                      <a:solidFill>
+                        <a:srgbClr val="FFFFFF"/>
+                      </a:solidFill>
+                      <a:prstDash val="solid"/>
+                      <a:round/>
+                      <a:headEnd type="none" w="med" len="med"/>
+                      <a:tailEnd type="none" w="med" len="med"/>
+                    </a:lnT>
+                    <a:lnB w="12700" cap="flat" cmpd="sng" algn="ctr">
+                      <a:solidFill>
+                        <a:srgbClr val="FFFFFF"/>
+                      </a:solidFill>
+                      <a:prstDash val="solid"/>
+                      <a:round/>
+                      <a:headEnd type="none" w="med" len="med"/>
+                      <a:tailEnd type="none" w="med" len="med"/>
+                    </a:lnB>
+                    <a:solidFill>
+                      <a:srgbClr val="1F7A78"/>
+                    </a:solidFill>
+                  </a:tcPr>
+                </a:tc>
               </a:tr>
               <a:tr h="475488">
                 <a:tc>
@@ -18276,7 +18788,68 @@
                             <a:srgbClr val="1B2A2F"/>
                           </a:solidFill>
                         </a:rPr>
-                        <a:t>覚え込み（学習と検証の差）を抑える</a:t>
+                        <a:t>覚え込みを抑える</a:t>
+                      </a:r>
+                      <a:endParaRPr lang="en-US" sz="1500" dirty="0"/>
+                    </a:p>
+                  </a:txBody>
+                  <a:tcPr marL="137160" marR="137160" marT="45720" marB="45720" anchor="ctr">
+                    <a:lnL w="12700" cap="flat" cmpd="sng" algn="ctr">
+                      <a:solidFill>
+                        <a:srgbClr val="FFFFFF"/>
+                      </a:solidFill>
+                      <a:prstDash val="solid"/>
+                      <a:round/>
+                      <a:headEnd type="none" w="med" len="med"/>
+                      <a:tailEnd type="none" w="med" len="med"/>
+                    </a:lnL>
+                    <a:lnR w="12700" cap="flat" cmpd="sng" algn="ctr">
+                      <a:solidFill>
+                        <a:srgbClr val="FFFFFF"/>
+                      </a:solidFill>
+                      <a:prstDash val="solid"/>
+                      <a:round/>
+                      <a:headEnd type="none" w="med" len="med"/>
+                      <a:tailEnd type="none" w="med" len="med"/>
+                    </a:lnR>
+                    <a:lnT w="12700" cap="flat" cmpd="sng" algn="ctr">
+                      <a:solidFill>
+                        <a:srgbClr val="FFFFFF"/>
+                      </a:solidFill>
+                      <a:prstDash val="solid"/>
+                      <a:round/>
+                      <a:headEnd type="none" w="med" len="med"/>
+                      <a:tailEnd type="none" w="med" len="med"/>
+                    </a:lnT>
+                    <a:lnB w="12700" cap="flat" cmpd="sng" algn="ctr">
+                      <a:solidFill>
+                        <a:srgbClr val="FFFFFF"/>
+                      </a:solidFill>
+                      <a:prstDash val="solid"/>
+                      <a:round/>
+                      <a:headEnd type="none" w="med" len="med"/>
+                      <a:tailEnd type="none" w="med" len="med"/>
+                    </a:lnB>
+                    <a:solidFill>
+                      <a:srgbClr val="EAF2F1"/>
+                    </a:solidFill>
+                  </a:tcPr>
+                </a:tc>
+                <a:tc>
+                  <a:txBody>
+                    <a:bodyPr/>
+                    <a:lstStyle/>
+                    <a:p>
+                      <a:pPr indent="0" marL="0">
+                        <a:buNone/>
+                      </a:pPr>
+                      <a:r>
+                        <a:rPr lang="en-US" sz="1500" dirty="0">
+                          <a:solidFill>
+                            <a:srgbClr val="1B2A2F"/>
+                          </a:solidFill>
+                        </a:rPr>
+                        <a:t>電荷・遮蔽も学ばせる</a:t>
                       </a:r>
                       <a:endParaRPr lang="en-US" sz="1500" dirty="0"/>
                     </a:p>
@@ -18461,7 +19034,68 @@
                             <a:srgbClr val="1B2A2F"/>
                           </a:solidFill>
                         </a:rPr>
-                        <a:t>0.1（事前学習のときと同じ）</a:t>
+                        <a:t>0.1</a:t>
+                      </a:r>
+                      <a:endParaRPr lang="en-US" sz="1500" dirty="0"/>
+                    </a:p>
+                  </a:txBody>
+                  <a:tcPr marL="137160" marR="137160" marT="45720" marB="45720" anchor="ctr">
+                    <a:lnL w="12700" cap="flat" cmpd="sng" algn="ctr">
+                      <a:solidFill>
+                        <a:srgbClr val="FFFFFF"/>
+                      </a:solidFill>
+                      <a:prstDash val="solid"/>
+                      <a:round/>
+                      <a:headEnd type="none" w="med" len="med"/>
+                      <a:tailEnd type="none" w="med" len="med"/>
+                    </a:lnL>
+                    <a:lnR w="12700" cap="flat" cmpd="sng" algn="ctr">
+                      <a:solidFill>
+                        <a:srgbClr val="FFFFFF"/>
+                      </a:solidFill>
+                      <a:prstDash val="solid"/>
+                      <a:round/>
+                      <a:headEnd type="none" w="med" len="med"/>
+                      <a:tailEnd type="none" w="med" len="med"/>
+                    </a:lnR>
+                    <a:lnT w="12700" cap="flat" cmpd="sng" algn="ctr">
+                      <a:solidFill>
+                        <a:srgbClr val="FFFFFF"/>
+                      </a:solidFill>
+                      <a:prstDash val="solid"/>
+                      <a:round/>
+                      <a:headEnd type="none" w="med" len="med"/>
+                      <a:tailEnd type="none" w="med" len="med"/>
+                    </a:lnT>
+                    <a:lnB w="12700" cap="flat" cmpd="sng" algn="ctr">
+                      <a:solidFill>
+                        <a:srgbClr val="FFFFFF"/>
+                      </a:solidFill>
+                      <a:prstDash val="solid"/>
+                      <a:round/>
+                      <a:headEnd type="none" w="med" len="med"/>
+                      <a:tailEnd type="none" w="med" len="med"/>
+                    </a:lnB>
+                    <a:solidFill>
+                      <a:srgbClr val="FFFFFF"/>
+                    </a:solidFill>
+                  </a:tcPr>
+                </a:tc>
+                <a:tc>
+                  <a:txBody>
+                    <a:bodyPr/>
+                    <a:lstStyle/>
+                    <a:p>
+                      <a:pPr indent="0" marL="0">
+                        <a:buNone/>
+                      </a:pPr>
+                      <a:r>
+                        <a:rPr lang="en-US" sz="1500" dirty="0">
+                          <a:solidFill>
+                            <a:srgbClr val="1B2A2F"/>
+                          </a:solidFill>
+                        </a:rPr>
+                        <a:t>なし</a:t>
                       </a:r>
                       <a:endParaRPr lang="en-US" sz="1500" dirty="0"/>
                     </a:p>
@@ -18524,7 +19158,7 @@
                             <a:srgbClr val="17424A"/>
                           </a:solidFill>
                         </a:rPr>
-                        <a:t>何を当てるか（損失）</a:t>
+                        <a:t>何を当てるか</a:t>
                       </a:r>
                       <a:endParaRPr lang="en-US" sz="1500" dirty="0"/>
                     </a:p>
@@ -18646,7 +19280,68 @@
                             <a:srgbClr val="1B2A2F"/>
                           </a:solidFill>
                         </a:rPr>
-                        <a:t>J ＋ 4 成分（fc / sd / pso / dso）</a:t>
+                        <a:t>J ＋ 4 成分</a:t>
+                      </a:r>
+                      <a:endParaRPr lang="en-US" sz="1500" dirty="0"/>
+                    </a:p>
+                  </a:txBody>
+                  <a:tcPr marL="137160" marR="137160" marT="45720" marB="45720" anchor="ctr">
+                    <a:lnL w="12700" cap="flat" cmpd="sng" algn="ctr">
+                      <a:solidFill>
+                        <a:srgbClr val="FFFFFF"/>
+                      </a:solidFill>
+                      <a:prstDash val="solid"/>
+                      <a:round/>
+                      <a:headEnd type="none" w="med" len="med"/>
+                      <a:tailEnd type="none" w="med" len="med"/>
+                    </a:lnL>
+                    <a:lnR w="12700" cap="flat" cmpd="sng" algn="ctr">
+                      <a:solidFill>
+                        <a:srgbClr val="FFFFFF"/>
+                      </a:solidFill>
+                      <a:prstDash val="solid"/>
+                      <a:round/>
+                      <a:headEnd type="none" w="med" len="med"/>
+                      <a:tailEnd type="none" w="med" len="med"/>
+                    </a:lnR>
+                    <a:lnT w="12700" cap="flat" cmpd="sng" algn="ctr">
+                      <a:solidFill>
+                        <a:srgbClr val="FFFFFF"/>
+                      </a:solidFill>
+                      <a:prstDash val="solid"/>
+                      <a:round/>
+                      <a:headEnd type="none" w="med" len="med"/>
+                      <a:tailEnd type="none" w="med" len="med"/>
+                    </a:lnT>
+                    <a:lnB w="12700" cap="flat" cmpd="sng" algn="ctr">
+                      <a:solidFill>
+                        <a:srgbClr val="FFFFFF"/>
+                      </a:solidFill>
+                      <a:prstDash val="solid"/>
+                      <a:round/>
+                      <a:headEnd type="none" w="med" len="med"/>
+                      <a:tailEnd type="none" w="med" len="med"/>
+                    </a:lnB>
+                    <a:solidFill>
+                      <a:srgbClr val="EAF2F1"/>
+                    </a:solidFill>
+                  </a:tcPr>
+                </a:tc>
+                <a:tc>
+                  <a:txBody>
+                    <a:bodyPr/>
+                    <a:lstStyle/>
+                    <a:p>
+                      <a:pPr indent="0" marL="0">
+                        <a:buNone/>
+                      </a:pPr>
+                      <a:r>
+                        <a:rPr lang="en-US" sz="1500" dirty="0">
+                          <a:solidFill>
+                            <a:srgbClr val="1B2A2F"/>
+                          </a:solidFill>
+                        </a:rPr>
+                        <a:t>J ＋ 原子の電荷・遮蔽</a:t>
                       </a:r>
                       <a:endParaRPr lang="en-US" sz="1500" dirty="0"/>
                     </a:p>
@@ -18709,7 +19404,7 @@
                             <a:srgbClr val="17424A"/>
                           </a:solidFill>
                         </a:rPr>
-                        <a:t>学習（A100）</a:t>
+                        <a:t>学習時間（A100）</a:t>
                       </a:r>
                       <a:endParaRPr lang="en-US" sz="1500" dirty="0"/>
                     </a:p>
@@ -18770,7 +19465,7 @@
                             <a:srgbClr val="1B2A2F"/>
                           </a:solidFill>
                         </a:rPr>
-                        <a:t>60 エポック・約 1 時間 10 分</a:t>
+                        <a:t>約 1 時間 10 分</a:t>
                       </a:r>
                       <a:endParaRPr lang="en-US" sz="1500" dirty="0"/>
                     </a:p>
@@ -18831,7 +19526,68 @@
                             <a:srgbClr val="1B2A2F"/>
                           </a:solidFill>
                         </a:rPr>
-                        <a:t>60 エポック・約 1 時間 20 分</a:t>
+                        <a:t>約 1 時間 20 分</a:t>
+                      </a:r>
+                      <a:endParaRPr lang="en-US" sz="1500" dirty="0"/>
+                    </a:p>
+                  </a:txBody>
+                  <a:tcPr marL="137160" marR="137160" marT="45720" marB="45720" anchor="ctr">
+                    <a:lnL w="12700" cap="flat" cmpd="sng" algn="ctr">
+                      <a:solidFill>
+                        <a:srgbClr val="FFFFFF"/>
+                      </a:solidFill>
+                      <a:prstDash val="solid"/>
+                      <a:round/>
+                      <a:headEnd type="none" w="med" len="med"/>
+                      <a:tailEnd type="none" w="med" len="med"/>
+                    </a:lnL>
+                    <a:lnR w="12700" cap="flat" cmpd="sng" algn="ctr">
+                      <a:solidFill>
+                        <a:srgbClr val="FFFFFF"/>
+                      </a:solidFill>
+                      <a:prstDash val="solid"/>
+                      <a:round/>
+                      <a:headEnd type="none" w="med" len="med"/>
+                      <a:tailEnd type="none" w="med" len="med"/>
+                    </a:lnR>
+                    <a:lnT w="12700" cap="flat" cmpd="sng" algn="ctr">
+                      <a:solidFill>
+                        <a:srgbClr val="FFFFFF"/>
+                      </a:solidFill>
+                      <a:prstDash val="solid"/>
+                      <a:round/>
+                      <a:headEnd type="none" w="med" len="med"/>
+                      <a:tailEnd type="none" w="med" len="med"/>
+                    </a:lnT>
+                    <a:lnB w="12700" cap="flat" cmpd="sng" algn="ctr">
+                      <a:solidFill>
+                        <a:srgbClr val="FFFFFF"/>
+                      </a:solidFill>
+                      <a:prstDash val="solid"/>
+                      <a:round/>
+                      <a:headEnd type="none" w="med" len="med"/>
+                      <a:tailEnd type="none" w="med" len="med"/>
+                    </a:lnB>
+                    <a:solidFill>
+                      <a:srgbClr val="FFFFFF"/>
+                    </a:solidFill>
+                  </a:tcPr>
+                </a:tc>
+                <a:tc>
+                  <a:txBody>
+                    <a:bodyPr/>
+                    <a:lstStyle/>
+                    <a:p>
+                      <a:pPr indent="0" marL="0">
+                        <a:buNone/>
+                      </a:pPr>
+                      <a:r>
+                        <a:rPr lang="en-US" sz="1500" dirty="0">
+                          <a:solidFill>
+                            <a:srgbClr val="1B2A2F"/>
+                          </a:solidFill>
+                        </a:rPr>
+                        <a:t>約 1 時間 15 分</a:t>
                       </a:r>
                       <a:endParaRPr lang="en-US" sz="1500" dirty="0"/>
                     </a:p>
@@ -19063,6 +19819,67 @@
                     </a:solidFill>
                   </a:tcPr>
                 </a:tc>
+                <a:tc>
+                  <a:txBody>
+                    <a:bodyPr/>
+                    <a:lstStyle/>
+                    <a:p>
+                      <a:pPr indent="0" marL="0">
+                        <a:buNone/>
+                      </a:pPr>
+                      <a:r>
+                        <a:rPr lang="en-US" sz="1500" b="1" dirty="0">
+                          <a:solidFill>
+                            <a:srgbClr val="1B2A2F"/>
+                          </a:solidFill>
+                        </a:rPr>
+                        <a:t>-2.379</a:t>
+                      </a:r>
+                      <a:endParaRPr lang="en-US" sz="1500" dirty="0"/>
+                    </a:p>
+                  </a:txBody>
+                  <a:tcPr marL="137160" marR="137160" marT="45720" marB="45720" anchor="ctr">
+                    <a:lnL w="12700" cap="flat" cmpd="sng" algn="ctr">
+                      <a:solidFill>
+                        <a:srgbClr val="FFFFFF"/>
+                      </a:solidFill>
+                      <a:prstDash val="solid"/>
+                      <a:round/>
+                      <a:headEnd type="none" w="med" len="med"/>
+                      <a:tailEnd type="none" w="med" len="med"/>
+                    </a:lnL>
+                    <a:lnR w="12700" cap="flat" cmpd="sng" algn="ctr">
+                      <a:solidFill>
+                        <a:srgbClr val="FFFFFF"/>
+                      </a:solidFill>
+                      <a:prstDash val="solid"/>
+                      <a:round/>
+                      <a:headEnd type="none" w="med" len="med"/>
+                      <a:tailEnd type="none" w="med" len="med"/>
+                    </a:lnR>
+                    <a:lnT w="12700" cap="flat" cmpd="sng" algn="ctr">
+                      <a:solidFill>
+                        <a:srgbClr val="FFFFFF"/>
+                      </a:solidFill>
+                      <a:prstDash val="solid"/>
+                      <a:round/>
+                      <a:headEnd type="none" w="med" len="med"/>
+                      <a:tailEnd type="none" w="med" len="med"/>
+                    </a:lnT>
+                    <a:lnB w="12700" cap="flat" cmpd="sng" algn="ctr">
+                      <a:solidFill>
+                        <a:srgbClr val="FFFFFF"/>
+                      </a:solidFill>
+                      <a:prstDash val="solid"/>
+                      <a:round/>
+                      <a:headEnd type="none" w="med" len="med"/>
+                      <a:tailEnd type="none" w="med" len="med"/>
+                    </a:lnB>
+                    <a:solidFill>
+                      <a:srgbClr val="EAF2F1"/>
+                    </a:solidFill>
+                  </a:tcPr>
+                </a:tc>
               </a:tr>
             </a:tbl>
           </a:graphicData>
@@ -19077,11 +19894,11 @@
         <p:spPr>
           <a:xfrm>
             <a:off x="548640" y="4434840"/>
-            <a:ext cx="5364328" cy="1463040"/>
+            <a:ext cx="3454298" cy="1600200"/>
           </a:xfrm>
           <a:prstGeom prst="roundRect">
             <a:avLst>
-              <a:gd name="adj" fmla="val 7500"/>
+              <a:gd name="adj" fmla="val 6857"/>
             </a:avLst>
           </a:prstGeom>
           <a:solidFill>
@@ -19103,8 +19920,8 @@
         </p:nvSpPr>
         <p:spPr>
           <a:xfrm>
-            <a:off x="822960" y="4663440"/>
-            <a:ext cx="502920" cy="502920"/>
+            <a:off x="777240" y="4617720"/>
+            <a:ext cx="457200" cy="457200"/>
           </a:xfrm>
           <a:prstGeom prst="ellipse">
             <a:avLst/>
@@ -19128,8 +19945,8 @@
         </p:nvSpPr>
         <p:spPr>
           <a:xfrm>
-            <a:off x="822960" y="4663440"/>
-            <a:ext cx="502920" cy="502920"/>
+            <a:off x="777240" y="4617720"/>
+            <a:ext cx="457200" cy="457200"/>
           </a:xfrm>
           <a:prstGeom prst="rect">
             <a:avLst/>
@@ -19145,14 +19962,14 @@
               <a:buNone/>
             </a:pPr>
             <a:r>
-              <a:rPr lang="en-US" sz="1600" b="1" dirty="0">
+              <a:rPr lang="en-US" sz="1500" b="1" dirty="0">
                 <a:solidFill>
                   <a:schemeClr val="bg1"/>
                 </a:solidFill>
               </a:rPr>
               <a:t>D</a:t>
             </a:r>
-            <a:endParaRPr lang="en-US" sz="1600" dirty="0"/>
+            <a:endParaRPr lang="en-US" sz="1500" dirty="0"/>
           </a:p>
         </p:txBody>
       </p:sp>
@@ -19164,8 +19981,8 @@
         </p:nvSpPr>
         <p:spPr>
           <a:xfrm>
-            <a:off x="1508760" y="4663440"/>
-            <a:ext cx="4175608" cy="365760"/>
+            <a:off x="1371600" y="4636008"/>
+            <a:ext cx="2448458" cy="411480"/>
           </a:xfrm>
           <a:prstGeom prst="rect">
             <a:avLst/>
@@ -19181,14 +19998,14 @@
               <a:buNone/>
             </a:pPr>
             <a:r>
-              <a:rPr lang="en-US" sz="1700" b="1" dirty="0">
+              <a:rPr lang="en-US" sz="1600" b="1" dirty="0">
                 <a:solidFill>
                   <a:schemeClr val="tx2"/>
                 </a:solidFill>
               </a:rPr>
-              <a:t>dropout とは</a:t>
-            </a:r>
-            <a:endParaRPr lang="en-US" sz="1700" dirty="0"/>
+              <a:t>dropout</a:t>
+            </a:r>
+            <a:endParaRPr lang="en-US" sz="1600" dirty="0"/>
           </a:p>
         </p:txBody>
       </p:sp>
@@ -19200,8 +20017,8 @@
         </p:nvSpPr>
         <p:spPr>
           <a:xfrm>
-            <a:off x="1508760" y="5074920"/>
-            <a:ext cx="4175608" cy="731520"/>
+            <a:off x="777240" y="5166360"/>
+            <a:ext cx="2997098" cy="777240"/>
           </a:xfrm>
           <a:prstGeom prst="rect">
             <a:avLst/>
@@ -19222,7 +20039,7 @@
                   <a:schemeClr val="tx1"/>
                 </a:solidFill>
               </a:rPr>
-              <a:t>学習中に、ランダムに一部のつながりを切る。特定のデータを丸暗記しにくくなる</a:t>
+              <a:t>学習中に一部のつながりをランダムに切り、丸暗記を防ぐ</a:t>
             </a:r>
             <a:endParaRPr lang="en-US" sz="1400" dirty="0"/>
           </a:p>
@@ -19236,12 +20053,12 @@
         </p:nvSpPr>
         <p:spPr>
           <a:xfrm>
-            <a:off x="6278728" y="4434840"/>
-            <a:ext cx="5364328" cy="1463040"/>
+            <a:off x="4368698" y="4434840"/>
+            <a:ext cx="3454298" cy="1600200"/>
           </a:xfrm>
           <a:prstGeom prst="roundRect">
             <a:avLst>
-              <a:gd name="adj" fmla="val 7500"/>
+              <a:gd name="adj" fmla="val 6857"/>
             </a:avLst>
           </a:prstGeom>
           <a:solidFill>
@@ -19263,8 +20080,8 @@
         </p:nvSpPr>
         <p:spPr>
           <a:xfrm>
-            <a:off x="6553048" y="4663440"/>
-            <a:ext cx="502920" cy="502920"/>
+            <a:off x="4597298" y="4617720"/>
+            <a:ext cx="457200" cy="457200"/>
           </a:xfrm>
           <a:prstGeom prst="ellipse">
             <a:avLst/>
@@ -19288,8 +20105,8 @@
         </p:nvSpPr>
         <p:spPr>
           <a:xfrm>
-            <a:off x="6553048" y="4663440"/>
-            <a:ext cx="502920" cy="502920"/>
+            <a:off x="4597298" y="4617720"/>
+            <a:ext cx="457200" cy="457200"/>
           </a:xfrm>
           <a:prstGeom prst="rect">
             <a:avLst/>
@@ -19305,14 +20122,14 @@
               <a:buNone/>
             </a:pPr>
             <a:r>
-              <a:rPr lang="en-US" sz="1600" b="1" dirty="0">
+              <a:rPr lang="en-US" sz="1500" b="1" dirty="0">
                 <a:solidFill>
                   <a:schemeClr val="bg1"/>
                 </a:solidFill>
               </a:rPr>
               <a:t>+</a:t>
             </a:r>
-            <a:endParaRPr lang="en-US" sz="1600" dirty="0"/>
+            <a:endParaRPr lang="en-US" sz="1500" dirty="0"/>
           </a:p>
         </p:txBody>
       </p:sp>
@@ -19324,8 +20141,8 @@
         </p:nvSpPr>
         <p:spPr>
           <a:xfrm>
-            <a:off x="7238848" y="4663440"/>
-            <a:ext cx="4175608" cy="365760"/>
+            <a:off x="5191658" y="4636008"/>
+            <a:ext cx="2448458" cy="411480"/>
           </a:xfrm>
           <a:prstGeom prst="rect">
             <a:avLst/>
@@ -19341,14 +20158,14 @@
               <a:buNone/>
             </a:pPr>
             <a:r>
-              <a:rPr lang="en-US" sz="1700" b="1" dirty="0">
+              <a:rPr lang="en-US" sz="1600" b="1" dirty="0">
                 <a:solidFill>
                   <a:schemeClr val="tx2"/>
                 </a:solidFill>
               </a:rPr>
-              <a:t>4 成分の補助損失とは</a:t>
-            </a:r>
-            <a:endParaRPr lang="en-US" sz="1700" dirty="0"/>
+              <a:t>4 成分の補助損失</a:t>
+            </a:r>
+            <a:endParaRPr lang="en-US" sz="1600" dirty="0"/>
           </a:p>
         </p:txBody>
       </p:sp>
@@ -19360,8 +20177,8 @@
         </p:nvSpPr>
         <p:spPr>
           <a:xfrm>
-            <a:off x="7238848" y="5074920"/>
-            <a:ext cx="4175608" cy="731520"/>
+            <a:off x="4597298" y="5166360"/>
+            <a:ext cx="2997098" cy="777240"/>
           </a:xfrm>
           <a:prstGeom prst="rect">
             <a:avLst/>
@@ -19382,9 +20199,205 @@
                   <a:schemeClr val="tx1"/>
                 </a:solidFill>
               </a:rPr>
-              <a:t>J だけでなく、J の内訳 fc / sd / pso / dso も一緒に当てさせる。3 位チームで効いた方法</a:t>
+              <a:t>J の内訳 fc / sd / pso / dso も一緒に当てさせる（3 位の方法）</a:t>
             </a:r>
             <a:endParaRPr lang="en-US" sz="1400" dirty="0"/>
+          </a:p>
+        </p:txBody>
+      </p:sp>
+      <p:sp>
+        <p:nvSpPr>
+          <p:cNvPr id="14" name="card_396"/>
+          <p:cNvSpPr/>
+          <p:nvPr/>
+        </p:nvSpPr>
+        <p:spPr>
+          <a:xfrm>
+            <a:off x="8188757" y="4434840"/>
+            <a:ext cx="3454298" cy="1600200"/>
+          </a:xfrm>
+          <a:prstGeom prst="roundRect">
+            <a:avLst>
+              <a:gd name="adj" fmla="val 6857"/>
+            </a:avLst>
+          </a:prstGeom>
+          <a:solidFill>
+            <a:schemeClr val="bg2"/>
+          </a:solidFill>
+          <a:ln w="9525">
+            <a:solidFill>
+              <a:schemeClr val="bg2"/>
+            </a:solidFill>
+            <a:prstDash val="solid"/>
+          </a:ln>
+        </p:spPr>
+      </p:sp>
+      <p:sp>
+        <p:nvSpPr>
+          <p:cNvPr id="15" name="atom_397"/>
+          <p:cNvSpPr/>
+          <p:nvPr/>
+        </p:nvSpPr>
+        <p:spPr>
+          <a:xfrm>
+            <a:off x="8417357" y="4617720"/>
+            <a:ext cx="457200" cy="457200"/>
+          </a:xfrm>
+          <a:prstGeom prst="ellipse">
+            <a:avLst/>
+          </a:prstGeom>
+          <a:solidFill>
+            <a:srgbClr val="1F7A78"/>
+          </a:solidFill>
+          <a:ln w="9525">
+            <a:solidFill>
+              <a:srgbClr val="1F7A78"/>
+            </a:solidFill>
+            <a:prstDash val="solid"/>
+          </a:ln>
+        </p:spPr>
+      </p:sp>
+      <p:sp>
+        <p:nvSpPr>
+          <p:cNvPr id="16" name="atomLabel_398"/>
+          <p:cNvSpPr txBox="1"/>
+          <p:nvPr/>
+        </p:nvSpPr>
+        <p:spPr>
+          <a:xfrm>
+            <a:off x="8417357" y="4617720"/>
+            <a:ext cx="457200" cy="457200"/>
+          </a:xfrm>
+          <a:prstGeom prst="rect">
+            <a:avLst/>
+          </a:prstGeom>
+          <a:noFill/>
+          <a:ln/>
+        </p:spPr>
+        <p:txBody>
+          <a:bodyPr wrap="square" lIns="0" tIns="0" rIns="0" bIns="0" rtlCol="0" anchor="ctr"/>
+          <a:lstStyle/>
+          <a:p>
+            <a:pPr algn="ctr" indent="0" marL="0">
+              <a:buNone/>
+            </a:pPr>
+            <a:r>
+              <a:rPr lang="en-US" sz="1500" b="1" dirty="0">
+                <a:solidFill>
+                  <a:schemeClr val="bg1"/>
+                </a:solidFill>
+              </a:rPr>
+              <a:t>+</a:t>
+            </a:r>
+            <a:endParaRPr lang="en-US" sz="1500" dirty="0"/>
+          </a:p>
+        </p:txBody>
+      </p:sp>
+      <p:sp>
+        <p:nvSpPr>
+          <p:cNvPr id="17" name="text_399"/>
+          <p:cNvSpPr txBox="1"/>
+          <p:nvPr/>
+        </p:nvSpPr>
+        <p:spPr>
+          <a:xfrm>
+            <a:off x="9011717" y="4636008"/>
+            <a:ext cx="2448458" cy="411480"/>
+          </a:xfrm>
+          <a:prstGeom prst="rect">
+            <a:avLst/>
+          </a:prstGeom>
+          <a:noFill/>
+          <a:ln/>
+        </p:spPr>
+        <p:txBody>
+          <a:bodyPr wrap="square" lIns="0" tIns="0" rIns="0" bIns="0" rtlCol="0" anchor="t"/>
+          <a:lstStyle/>
+          <a:p>
+            <a:pPr indent="0" marL="0">
+              <a:buNone/>
+            </a:pPr>
+            <a:r>
+              <a:rPr lang="en-US" sz="1600" b="1" dirty="0">
+                <a:solidFill>
+                  <a:schemeClr val="tx2"/>
+                </a:solidFill>
+              </a:rPr>
+              <a:t>原子の補助ターゲット</a:t>
+            </a:r>
+            <a:endParaRPr lang="en-US" sz="1600" dirty="0"/>
+          </a:p>
+        </p:txBody>
+      </p:sp>
+      <p:sp>
+        <p:nvSpPr>
+          <p:cNvPr id="18" name="text_400"/>
+          <p:cNvSpPr txBox="1"/>
+          <p:nvPr/>
+        </p:nvSpPr>
+        <p:spPr>
+          <a:xfrm>
+            <a:off x="8417357" y="5166360"/>
+            <a:ext cx="2997098" cy="777240"/>
+          </a:xfrm>
+          <a:prstGeom prst="rect">
+            <a:avLst/>
+          </a:prstGeom>
+          <a:noFill/>
+          <a:ln/>
+        </p:spPr>
+        <p:txBody>
+          <a:bodyPr wrap="square" lIns="0" tIns="0" rIns="0" bIns="0" rtlCol="0" anchor="t"/>
+          <a:lstStyle/>
+          <a:p>
+            <a:pPr indent="0" marL="0">
+              <a:buNone/>
+            </a:pPr>
+            <a:r>
+              <a:rPr lang="en-US" sz="1400" dirty="0">
+                <a:solidFill>
+                  <a:schemeClr val="tx1"/>
+                </a:solidFill>
+              </a:rPr>
+              <a:t>原子ごとに Mulliken 電荷と遮蔽も当てさせる（train だけの値）</a:t>
+            </a:r>
+            <a:endParaRPr lang="en-US" sz="1400" dirty="0"/>
+          </a:p>
+        </p:txBody>
+      </p:sp>
+      <p:sp>
+        <p:nvSpPr>
+          <p:cNvPr id="19" name="text_401"/>
+          <p:cNvSpPr txBox="1"/>
+          <p:nvPr/>
+        </p:nvSpPr>
+        <p:spPr>
+          <a:xfrm>
+            <a:off x="548640" y="6108192"/>
+            <a:ext cx="10972800" cy="274320"/>
+          </a:xfrm>
+          <a:prstGeom prst="rect">
+            <a:avLst/>
+          </a:prstGeom>
+          <a:noFill/>
+          <a:ln/>
+        </p:spPr>
+        <p:txBody>
+          <a:bodyPr wrap="square" lIns="0" tIns="0" rIns="0" bIns="0" rtlCol="0" anchor="t"/>
+          <a:lstStyle/>
+          <a:p>
+            <a:pPr indent="0" marL="0">
+              <a:buNone/>
+            </a:pPr>
+            <a:r>
+              <a:rPr lang="en-US" sz="1100" dirty="0">
+                <a:solidFill>
+                  <a:srgbClr val="5B7DA8"/>
+                </a:solidFill>
+              </a:rPr>
+              <a:t>どれも 60 エポック。原子の補助ターゲットは、EDA で効くと分かった値を学習のときだけ使う</a:t>
+            </a:r>
+            <a:endParaRPr lang="en-US" sz="1100" dirty="0"/>
           </a:p>
         </p:txBody>
       </p:sp>
@@ -20346,7 +21359,7 @@
                   <a:srgbClr val="F2C14E"/>
                 </a:solidFill>
               </a:rPr>
-              <a:t>-2.424</a:t>
+              <a:t>-2.497</a:t>
             </a:r>
             <a:endParaRPr lang="en-US" sz="6600" dirty="0"/>
           </a:p>
@@ -20422,7 +21435,7 @@
                   <a:srgbClr val="FFFFFF"/>
                 </a:solidFill>
               </a:rPr>
-              <a:t>最終 LB なら 38 位前後（2,749 チーム中、銀メダル圏）</a:t>
+              <a:t>最終 LB なら 33 位前後（2,749 チーム中、銀メダル圏）</a:t>
             </a:r>
             <a:endParaRPr lang="en-US" sz="1600" dirty="0"/>
           </a:p>
@@ -20440,7 +21453,7 @@
                   <a:srgbClr val="FFFFFF"/>
                 </a:solidFill>
               </a:rPr>
-              <a:t>Public -2.436</a:t>
+              <a:t>Public -2.507</a:t>
             </a:r>
             <a:endParaRPr lang="en-US" sz="1600" dirty="0"/>
           </a:p>
@@ -20458,7 +21471,7 @@
                   <a:srgbClr val="FFFFFF"/>
                 </a:solidFill>
               </a:rPr>
-              <a:t>Uni-Mol の fine-tune 2 本を 7:3 で平均（1 本 A100 で約 1 時間強）</a:t>
+              <a:t>Uni-Mol の fine-tune 3 本を平均（1 本 A100 で約 1 時間強）</a:t>
             </a:r>
             <a:endParaRPr lang="en-US" sz="1600" dirty="0"/>
           </a:p>
@@ -20566,7 +21579,7 @@
                   <a:schemeClr val="tx2"/>
                 </a:solidFill>
               </a:rPr>
-              <a:t>結果：2 本の平均で -2.42</a:t>
+              <a:t>結果：3 本の平均で -2.50</a:t>
             </a:r>
             <a:endParaRPr lang="en-US" sz="3200" dirty="0"/>
           </a:p>
@@ -20574,7 +21587,7 @@
       </p:sp>
       <p:graphicFrame>
         <p:nvGraphicFramePr>
-          <p:cNvPr id="3" name="chart_396" descr=""/>
+          <p:cNvPr id="3" name="chart_402" descr=""/>
           <p:cNvGraphicFramePr/>
           <p:nvPr/>
         </p:nvGraphicFramePr>
@@ -20590,7 +21603,7 @@
       </p:graphicFrame>
       <p:sp>
         <p:nvSpPr>
-          <p:cNvPr id="4" name="card_397"/>
+          <p:cNvPr id="4" name="card_403"/>
           <p:cNvSpPr/>
           <p:nvPr/>
         </p:nvSpPr>
@@ -20617,7 +21630,7 @@
       </p:sp>
       <p:sp>
         <p:nvSpPr>
-          <p:cNvPr id="5" name="text_398"/>
+          <p:cNvPr id="5" name="text_404"/>
           <p:cNvSpPr txBox="1"/>
           <p:nvPr/>
         </p:nvSpPr>
@@ -20653,7 +21666,7 @@
       </p:sp>
       <p:sp>
         <p:nvSpPr>
-          <p:cNvPr id="6" name="text_399"/>
+          <p:cNvPr id="6" name="text_405"/>
           <p:cNvSpPr txBox="1"/>
           <p:nvPr/>
         </p:nvSpPr>
@@ -20681,7 +21694,7 @@
                   <a:schemeClr val="tx1"/>
                 </a:solidFill>
               </a:rPr>
-              <a:t>基本の設定（Private）</a:t>
+              <a:t>基本の設定だけ（Private）</a:t>
             </a:r>
             <a:endParaRPr lang="en-US" sz="1300" dirty="0"/>
           </a:p>
@@ -20689,7 +21702,7 @@
       </p:sp>
       <p:sp>
         <p:nvSpPr>
-          <p:cNvPr id="7" name="card_400"/>
+          <p:cNvPr id="7" name="card_406"/>
           <p:cNvSpPr/>
           <p:nvPr/>
         </p:nvSpPr>
@@ -20716,7 +21729,7 @@
       </p:sp>
       <p:sp>
         <p:nvSpPr>
-          <p:cNvPr id="8" name="text_401"/>
+          <p:cNvPr id="8" name="text_407"/>
           <p:cNvSpPr txBox="1"/>
           <p:nvPr/>
         </p:nvSpPr>
@@ -20744,7 +21757,7 @@
                   <a:schemeClr val="accent1"/>
                 </a:solidFill>
               </a:rPr>
-              <a:t>-2.159</a:t>
+              <a:t>-2.424</a:t>
             </a:r>
             <a:endParaRPr lang="en-US" sz="2600" dirty="0"/>
           </a:p>
@@ -20752,7 +21765,7 @@
       </p:sp>
       <p:sp>
         <p:nvSpPr>
-          <p:cNvPr id="9" name="text_402"/>
+          <p:cNvPr id="9" name="text_408"/>
           <p:cNvSpPr txBox="1"/>
           <p:nvPr/>
         </p:nvSpPr>
@@ -20780,7 +21793,7 @@
                   <a:schemeClr val="tx1"/>
                 </a:solidFill>
               </a:rPr>
-              <a:t>覚え込み対策あり（検証）</a:t>
+              <a:t>＋覚え込み対策を平均（Private）</a:t>
             </a:r>
             <a:endParaRPr lang="en-US" sz="1300" dirty="0"/>
           </a:p>
@@ -20788,7 +21801,7 @@
       </p:sp>
       <p:sp>
         <p:nvSpPr>
-          <p:cNvPr id="10" name="card_403"/>
+          <p:cNvPr id="10" name="card_409"/>
           <p:cNvSpPr/>
           <p:nvPr/>
         </p:nvSpPr>
@@ -20815,7 +21828,7 @@
       </p:sp>
       <p:sp>
         <p:nvSpPr>
-          <p:cNvPr id="11" name="text_404"/>
+          <p:cNvPr id="11" name="text_410"/>
           <p:cNvSpPr txBox="1"/>
           <p:nvPr/>
         </p:nvSpPr>
@@ -20843,7 +21856,7 @@
                   <a:srgbClr val="F2C14E"/>
                 </a:solidFill>
               </a:rPr>
-              <a:t>-2.424</a:t>
+              <a:t>-2.497</a:t>
             </a:r>
             <a:endParaRPr lang="en-US" sz="2600" dirty="0"/>
           </a:p>
@@ -20851,7 +21864,7 @@
       </p:sp>
       <p:sp>
         <p:nvSpPr>
-          <p:cNvPr id="12" name="text_405"/>
+          <p:cNvPr id="12" name="text_411"/>
           <p:cNvSpPr txBox="1"/>
           <p:nvPr/>
         </p:nvSpPr>
@@ -20879,7 +21892,7 @@
                   <a:srgbClr val="FFFFFF"/>
                 </a:solidFill>
               </a:rPr>
-              <a:t>2 つを 7:3 で平均（Private）</a:t>
+              <a:t>3 本を平均（Private）</a:t>
             </a:r>
             <a:endParaRPr lang="en-US" sz="1300" dirty="0"/>
           </a:p>
@@ -20887,14 +21900,14 @@
       </p:sp>
       <p:sp>
         <p:nvSpPr>
-          <p:cNvPr id="13" name="text_406"/>
+          <p:cNvPr id="13" name="text_412"/>
           <p:cNvSpPr txBox="1"/>
           <p:nvPr/>
         </p:nvSpPr>
         <p:spPr>
           <a:xfrm>
             <a:off x="7863840" y="4526280"/>
-            <a:ext cx="3776472" cy="1371600"/>
+            <a:ext cx="3776472" cy="1691640"/>
           </a:xfrm>
           <a:prstGeom prst="rect">
             <a:avLst/>
@@ -20919,7 +21932,7 @@
                   <a:schemeClr val="tx1"/>
                 </a:solidFill>
               </a:rPr>
-              <a:t>検証と LB がほぼ一致（基本の設定：検証 -2.385 / Private -2.372）</a:t>
+              <a:t>検証と LB がほぼ一致（3 本の平均：検証 -2.511 / Private -2.497）</a:t>
             </a:r>
             <a:endParaRPr lang="en-US" sz="1600" dirty="0"/>
           </a:p>
@@ -20937,7 +21950,7 @@
                   <a:schemeClr val="tx1"/>
                 </a:solidFill>
               </a:rPr>
-              <a:t>覚え込み対策ありは単体では全 type で悪化。でも混ぜると +0.05</a:t>
+              <a:t>単体では基本の設定が最良。でも混ぜると伸びる</a:t>
             </a:r>
             <a:endParaRPr lang="en-US" sz="1600" dirty="0"/>
           </a:p>
@@ -20955,7 +21968,7 @@
                   <a:schemeClr val="tx1"/>
                 </a:solidFill>
               </a:rPr>
-              <a:t>平均の重みは検証で決めた（7:3 が最良）</a:t>
+              <a:t>重みは 0.5 / 0.1 / 0.4（検証で決定）</a:t>
             </a:r>
             <a:endParaRPr lang="en-US" sz="1600" dirty="0"/>
           </a:p>
@@ -21071,7 +22084,7 @@
       </p:sp>
       <p:sp>
         <p:nvSpPr>
-          <p:cNvPr id="3" name="text_407"/>
+          <p:cNvPr id="3" name="text_413"/>
           <p:cNvSpPr txBox="1"/>
           <p:nvPr/>
         </p:nvSpPr>
@@ -21107,7 +22120,7 @@
       </p:sp>
       <p:sp>
         <p:nvSpPr>
-          <p:cNvPr id="4" name="text_408"/>
+          <p:cNvPr id="4" name="text_414"/>
           <p:cNvSpPr txBox="1"/>
           <p:nvPr/>
         </p:nvSpPr>
@@ -21139,7 +22152,7 @@
                   <a:srgbClr val="FFFFFF"/>
                 </a:solidFill>
               </a:rPr>
-              <a:t>事前学習モデルの fine-tune で、LightGBM の上限（-2.0〜-2.1）を超えて銀メダル圏</a:t>
+              <a:t>事前学習モデルの fine-tune 3 本の平均で銀メダル圏（Private -2.497）</a:t>
             </a:r>
             <a:endParaRPr lang="en-US" sz="1600" dirty="0"/>
           </a:p>
@@ -21175,7 +22188,7 @@
                   <a:srgbClr val="FFFFFF"/>
                 </a:solidFill>
               </a:rPr>
-              <a:t>覚え込み対策は 60 エポックでは逆効果。ただし混ぜると効く</a:t>
+              <a:t>覚え込み対策・原子の補助ターゲットは単体では伸びない。でも性格が違うので、混ぜると効く</a:t>
             </a:r>
             <a:endParaRPr lang="en-US" sz="1600" dirty="0"/>
           </a:p>
@@ -21193,7 +22206,7 @@
                   <a:srgbClr val="FFFFFF"/>
                 </a:solidFill>
               </a:rPr>
-              <a:t>1JHC・1JHN・3JHC が弱い（値の幅が大きい type）</a:t>
+              <a:t>1JHC・3JHC が弱い。原子の補助ターゲットで 1JHN は改善</a:t>
             </a:r>
             <a:endParaRPr lang="en-US" sz="1600" dirty="0"/>
           </a:p>
@@ -21201,7 +22214,7 @@
       </p:sp>
       <p:sp>
         <p:nvSpPr>
-          <p:cNvPr id="5" name="text_409"/>
+          <p:cNvPr id="5" name="text_415"/>
           <p:cNvSpPr txBox="1"/>
           <p:nvPr/>
         </p:nvSpPr>
@@ -21237,7 +22250,7 @@
       </p:sp>
       <p:sp>
         <p:nvSpPr>
-          <p:cNvPr id="6" name="atom_410"/>
+          <p:cNvPr id="6" name="atom_416"/>
           <p:cNvSpPr/>
           <p:nvPr/>
         </p:nvSpPr>
@@ -21262,7 +22275,7 @@
       </p:sp>
       <p:sp>
         <p:nvSpPr>
-          <p:cNvPr id="7" name="atomLabel_411"/>
+          <p:cNvPr id="7" name="atomLabel_417"/>
           <p:cNvSpPr txBox="1"/>
           <p:nvPr/>
         </p:nvSpPr>
@@ -21298,7 +22311,7 @@
       </p:sp>
       <p:sp>
         <p:nvSpPr>
-          <p:cNvPr id="8" name="text_412"/>
+          <p:cNvPr id="8" name="text_418"/>
           <p:cNvSpPr txBox="1"/>
           <p:nvPr/>
         </p:nvSpPr>
@@ -21334,7 +22347,7 @@
       </p:sp>
       <p:sp>
         <p:nvSpPr>
-          <p:cNvPr id="9" name="text_413"/>
+          <p:cNvPr id="9" name="text_419"/>
           <p:cNvSpPr txBox="1"/>
           <p:nvPr/>
         </p:nvSpPr>
@@ -21370,7 +22383,7 @@
       </p:sp>
       <p:sp>
         <p:nvSpPr>
-          <p:cNvPr id="10" name="atom_414"/>
+          <p:cNvPr id="10" name="atom_420"/>
           <p:cNvSpPr/>
           <p:nvPr/>
         </p:nvSpPr>
@@ -21395,7 +22408,7 @@
       </p:sp>
       <p:sp>
         <p:nvSpPr>
-          <p:cNvPr id="11" name="atomLabel_415"/>
+          <p:cNvPr id="11" name="atomLabel_421"/>
           <p:cNvSpPr txBox="1"/>
           <p:nvPr/>
         </p:nvSpPr>
@@ -21431,7 +22444,7 @@
       </p:sp>
       <p:sp>
         <p:nvSpPr>
-          <p:cNvPr id="12" name="text_416"/>
+          <p:cNvPr id="12" name="text_422"/>
           <p:cNvSpPr txBox="1"/>
           <p:nvPr/>
         </p:nvSpPr>
@@ -21459,7 +22472,7 @@
                   <a:srgbClr val="FFFFFF"/>
                 </a:solidFill>
               </a:rPr>
-              <a:t>シード違いのモデルを増やして平均</a:t>
+              <a:t>性格の違うモデルを増やして平均</a:t>
             </a:r>
             <a:endParaRPr lang="en-US" sz="1700" dirty="0"/>
           </a:p>
@@ -21467,7 +22480,7 @@
       </p:sp>
       <p:sp>
         <p:nvSpPr>
-          <p:cNvPr id="13" name="text_417"/>
+          <p:cNvPr id="13" name="text_423"/>
           <p:cNvSpPr txBox="1"/>
           <p:nvPr/>
         </p:nvSpPr>
@@ -21495,7 +22508,7 @@
                   <a:srgbClr val="9DB9B0"/>
                 </a:solidFill>
               </a:rPr>
-              <a:t>2 本の平均で +0.05。本数を増やす</a:t>
+              <a:t>3 本の平均で -2.37 → -2.50。本数を増やす</a:t>
             </a:r>
             <a:endParaRPr lang="en-US" sz="1400" dirty="0"/>
           </a:p>
@@ -21503,7 +22516,7 @@
       </p:sp>
       <p:sp>
         <p:nvSpPr>
-          <p:cNvPr id="14" name="atom_418"/>
+          <p:cNvPr id="14" name="atom_424"/>
           <p:cNvSpPr/>
           <p:nvPr/>
         </p:nvSpPr>
@@ -21528,7 +22541,7 @@
       </p:sp>
       <p:sp>
         <p:nvSpPr>
-          <p:cNvPr id="15" name="atomLabel_419"/>
+          <p:cNvPr id="15" name="atomLabel_425"/>
           <p:cNvSpPr txBox="1"/>
           <p:nvPr/>
         </p:nvSpPr>
@@ -21564,7 +22577,7 @@
       </p:sp>
       <p:sp>
         <p:nvSpPr>
-          <p:cNvPr id="16" name="text_420"/>
+          <p:cNvPr id="16" name="text_426"/>
           <p:cNvSpPr txBox="1"/>
           <p:nvPr/>
         </p:nvSpPr>
@@ -21600,7 +22613,7 @@
       </p:sp>
       <p:sp>
         <p:nvSpPr>
-          <p:cNvPr id="17" name="text_421"/>
+          <p:cNvPr id="17" name="text_427"/>
           <p:cNvSpPr txBox="1"/>
           <p:nvPr/>
         </p:nvSpPr>
@@ -27677,7 +28690,7 @@
       </p:sp>
       <p:pic>
         <p:nvPicPr>
-          <p:cNvPr id="6" name="karplus_125" descr="/tmp/predicting-molecular-properties/notebooks/figs/06_karplus_by_path.png">    </p:cNvPr>
+          <p:cNvPr id="6" name="karplus_125" descr="/Users/kinopee/Desktop/kaggle/Predicting Molecular Properties/notebooks/figs/06_karplus_by_path.png">    </p:cNvPr>
           <p:cNvPicPr>
             <a:picLocks noChangeAspect="1"/>
           </p:cNvPicPr>
